--- a/Slides/CSC6032/Advanced-OS-01-Introduction.pptx
+++ b/Slides/CSC6032/Advanced-OS-01-Introduction.pptx
@@ -249,7 +249,7 @@
             <a:fld id="{45BDCE37-E9BE-4280-8D68-34E43D66CEDB}" type="datetimeFigureOut">
               <a:rPr lang="zh-TW" altLang="en-US" smtClean="0"/>
               <a:pPr/>
-              <a:t>2024/9/4</a:t>
+              <a:t>2026/9/21</a:t>
             </a:fld>
             <a:endParaRPr lang="zh-TW" altLang="en-US"/>
           </a:p>
@@ -416,7 +416,7 @@
             <a:fld id="{FBFBA883-381C-409E-9635-BB54B21745E4}" type="datetimeFigureOut">
               <a:rPr lang="zh-TW" altLang="en-US" smtClean="0"/>
               <a:pPr/>
-              <a:t>2024/9/4</a:t>
+              <a:t>2026/9/21</a:t>
             </a:fld>
             <a:endParaRPr lang="zh-TW" altLang="en-US"/>
           </a:p>
@@ -3772,6 +3772,8 @@
                     </a:srgbClr>
                   </a:outerShdw>
                 </a:effectLst>
+                <a:latin typeface="Times New Roman" panose="02020603050405020304" pitchFamily="18" charset="0"/>
+                <a:cs typeface="Times New Roman" panose="02020603050405020304" pitchFamily="18" charset="0"/>
               </a:rPr>
               <a:t>CSC</a:t>
             </a:r>
@@ -3784,6 +3786,8 @@
                     </a:srgbClr>
                   </a:outerShdw>
                 </a:effectLst>
+                <a:latin typeface="Times New Roman" panose="02020603050405020304" pitchFamily="18" charset="0"/>
+                <a:cs typeface="Times New Roman" panose="02020603050405020304" pitchFamily="18" charset="0"/>
               </a:rPr>
               <a:t>6032</a:t>
             </a:r>
@@ -3796,6 +3800,8 @@
                     </a:srgbClr>
                   </a:outerShdw>
                 </a:effectLst>
+                <a:latin typeface="Times New Roman" panose="02020603050405020304" pitchFamily="18" charset="0"/>
+                <a:cs typeface="Times New Roman" panose="02020603050405020304" pitchFamily="18" charset="0"/>
               </a:rPr>
               <a:t> – Advanced Operating Systems</a:t>
             </a:r>
@@ -3807,6 +3813,8 @@
                   </a:srgbClr>
                 </a:outerShdw>
               </a:effectLst>
+              <a:latin typeface="Times New Roman" panose="02020603050405020304" pitchFamily="18" charset="0"/>
+              <a:cs typeface="Times New Roman" panose="02020603050405020304" pitchFamily="18" charset="0"/>
             </a:endParaRPr>
           </a:p>
         </p:txBody>
@@ -3840,6 +3848,8 @@
                     </a:srgbClr>
                   </a:outerShdw>
                 </a:effectLst>
+                <a:latin typeface="Times New Roman" panose="02020603050405020304" pitchFamily="18" charset="0"/>
+                <a:cs typeface="Times New Roman" panose="02020603050405020304" pitchFamily="18" charset="0"/>
               </a:rPr>
               <a:t>Prof. </a:t>
             </a:r>
@@ -3852,6 +3862,8 @@
                     </a:srgbClr>
                   </a:outerShdw>
                 </a:effectLst>
+                <a:latin typeface="Times New Roman" panose="02020603050405020304" pitchFamily="18" charset="0"/>
+                <a:cs typeface="Times New Roman" panose="02020603050405020304" pitchFamily="18" charset="0"/>
               </a:rPr>
               <a:t>Yeh-Ching</a:t>
             </a:r>
@@ -3864,6 +3876,8 @@
                     </a:srgbClr>
                   </a:outerShdw>
                 </a:effectLst>
+                <a:latin typeface="Times New Roman" panose="02020603050405020304" pitchFamily="18" charset="0"/>
+                <a:cs typeface="Times New Roman" panose="02020603050405020304" pitchFamily="18" charset="0"/>
               </a:rPr>
               <a:t> Chung</a:t>
             </a:r>
@@ -3877,25 +3891,39 @@
                   </a:srgbClr>
                 </a:outerShdw>
               </a:effectLst>
+              <a:latin typeface="Times New Roman" panose="02020603050405020304" pitchFamily="18" charset="0"/>
+              <a:cs typeface="Times New Roman" panose="02020603050405020304" pitchFamily="18" charset="0"/>
             </a:endParaRPr>
           </a:p>
           <a:p>
             <a:r>
-              <a:rPr lang="en-US" altLang="zh-TW" sz="2400" dirty="0"/>
+              <a:rPr lang="en-US" altLang="zh-TW" sz="2400" dirty="0">
+                <a:latin typeface="Times New Roman" panose="02020603050405020304" pitchFamily="18" charset="0"/>
+                <a:cs typeface="Times New Roman" panose="02020603050405020304" pitchFamily="18" charset="0"/>
+              </a:rPr>
               <a:t>School of </a:t>
             </a:r>
             <a:r>
-              <a:rPr lang="en-US" altLang="zh-CN" sz="2400" dirty="0"/>
+              <a:rPr lang="en-US" altLang="zh-CN" sz="2400" dirty="0">
+                <a:latin typeface="Times New Roman" panose="02020603050405020304" pitchFamily="18" charset="0"/>
+                <a:cs typeface="Times New Roman" panose="02020603050405020304" pitchFamily="18" charset="0"/>
+              </a:rPr>
               <a:t>Data </a:t>
             </a:r>
             <a:r>
-              <a:rPr lang="en-US" altLang="zh-TW" sz="2400" dirty="0"/>
+              <a:rPr lang="en-US" altLang="zh-TW" sz="2400" dirty="0">
+                <a:latin typeface="Times New Roman" panose="02020603050405020304" pitchFamily="18" charset="0"/>
+                <a:cs typeface="Times New Roman" panose="02020603050405020304" pitchFamily="18" charset="0"/>
+              </a:rPr>
               <a:t>Science</a:t>
             </a:r>
           </a:p>
           <a:p>
             <a:r>
-              <a:rPr lang="en-US" altLang="zh-TW" sz="2400" dirty="0"/>
+              <a:rPr lang="en-US" altLang="zh-TW" sz="2400" dirty="0">
+                <a:latin typeface="Times New Roman" panose="02020603050405020304" pitchFamily="18" charset="0"/>
+                <a:cs typeface="Times New Roman" panose="02020603050405020304" pitchFamily="18" charset="0"/>
+              </a:rPr>
               <a:t>Chinese University of Hong Kong, Shenzhen</a:t>
             </a:r>
           </a:p>
@@ -10603,8 +10631,8 @@
         </p:nvSpPr>
         <p:spPr bwMode="auto">
           <a:xfrm>
-            <a:off x="798897" y="108349"/>
-            <a:ext cx="8268101" cy="519113"/>
+            <a:off x="872067" y="108349"/>
+            <a:ext cx="8194931" cy="519113"/>
           </a:xfrm>
           <a:prstGeom prst="rect">
             <a:avLst/>
@@ -10954,8 +10982,8 @@
         </p:nvSpPr>
         <p:spPr bwMode="auto">
           <a:xfrm>
-            <a:off x="798897" y="108349"/>
-            <a:ext cx="8268101" cy="519113"/>
+            <a:off x="872067" y="108349"/>
+            <a:ext cx="8194931" cy="519113"/>
           </a:xfrm>
           <a:prstGeom prst="rect">
             <a:avLst/>
@@ -12260,8 +12288,8 @@
         </p:blipFill>
         <p:spPr>
           <a:xfrm>
-            <a:off x="1987617" y="1269380"/>
-            <a:ext cx="5168766" cy="3269030"/>
+            <a:off x="2197697" y="1625600"/>
+            <a:ext cx="4633316" cy="2878943"/>
           </a:xfrm>
           <a:prstGeom prst="rect">
             <a:avLst/>

--- a/Slides/CSC6032/Advanced-OS-01-Introduction.pptx
+++ b/Slides/CSC6032/Advanced-OS-01-Introduction.pptx
@@ -249,7 +249,7 @@
             <a:fld id="{45BDCE37-E9BE-4280-8D68-34E43D66CEDB}" type="datetimeFigureOut">
               <a:rPr lang="zh-TW" altLang="en-US" smtClean="0"/>
               <a:pPr/>
-              <a:t>2026/9/21</a:t>
+              <a:t>2026/9/25</a:t>
             </a:fld>
             <a:endParaRPr lang="zh-TW" altLang="en-US"/>
           </a:p>
@@ -416,7 +416,7 @@
             <a:fld id="{FBFBA883-381C-409E-9635-BB54B21745E4}" type="datetimeFigureOut">
               <a:rPr lang="zh-TW" altLang="en-US" smtClean="0"/>
               <a:pPr/>
-              <a:t>2026/9/21</a:t>
+              <a:t>2026/9/25</a:t>
             </a:fld>
             <a:endParaRPr lang="zh-TW" altLang="en-US"/>
           </a:p>
@@ -12288,8 +12288,8 @@
         </p:blipFill>
         <p:spPr>
           <a:xfrm>
-            <a:off x="2197697" y="1625600"/>
-            <a:ext cx="4633316" cy="2878943"/>
+            <a:off x="2434204" y="1553018"/>
+            <a:ext cx="4275592" cy="2690097"/>
           </a:xfrm>
           <a:prstGeom prst="rect">
             <a:avLst/>
